--- a/Курс 2 Сем 1/Веб-райтинг/Лабораторная работа 6.pptx
+++ b/Курс 2 Сем 1/Веб-райтинг/Лабораторная работа 6.pptx
@@ -234,7 +234,7 @@
           <a:p>
             <a:fld id="{06B9DC91-30C7-46AB-ADDB-A80A0533D77A}" type="datetimeFigureOut">
               <a:rPr lang="ru-RU" smtClean="0"/>
-              <a:t>09.12.2025</a:t>
+              <a:t>16.12.2025</a:t>
             </a:fld>
             <a:endParaRPr lang="ru-RU"/>
           </a:p>
@@ -1798,7 +1798,7 @@
           <a:p>
             <a:fld id="{D92D3C23-8038-4008-B24E-40A94D79456D}" type="datetime1">
               <a:rPr lang="ru-RU" smtClean="0"/>
-              <a:t>09.12.2025</a:t>
+              <a:t>16.12.2025</a:t>
             </a:fld>
             <a:endParaRPr lang="ru-RU"/>
           </a:p>
@@ -2246,7 +2246,7 @@
           <a:p>
             <a:fld id="{4FBADD92-CC98-4900-BE8A-2068547BBC1A}" type="datetime1">
               <a:rPr lang="ru-RU" smtClean="0"/>
-              <a:t>09.12.2025</a:t>
+              <a:t>16.12.2025</a:t>
             </a:fld>
             <a:endParaRPr lang="ru-RU"/>
           </a:p>
@@ -2564,7 +2564,7 @@
           <a:p>
             <a:fld id="{06738898-160C-4747-9301-0B5702FA49D8}" type="datetime1">
               <a:rPr lang="ru-RU" smtClean="0"/>
-              <a:t>09.12.2025</a:t>
+              <a:t>16.12.2025</a:t>
             </a:fld>
             <a:endParaRPr lang="ru-RU"/>
           </a:p>
@@ -2691,7 +2691,7 @@
           <a:p>
             <a:fld id="{F1EBB16F-DABE-4712-B47F-7722E1CB50FE}" type="datetime1">
               <a:rPr lang="ru-RU" smtClean="0"/>
-              <a:t>09.12.2025</a:t>
+              <a:t>16.12.2025</a:t>
             </a:fld>
             <a:endParaRPr lang="ru-RU" dirty="0"/>
           </a:p>
@@ -2744,7 +2744,7 @@
           <a:p>
             <a:fld id="{2CEBEA22-9938-4273-8C60-D80B349E4BA9}" type="datetime1">
               <a:rPr lang="ru-RU" smtClean="0"/>
-              <a:t>09.12.2025</a:t>
+              <a:t>16.12.2025</a:t>
             </a:fld>
             <a:endParaRPr lang="ru-RU"/>
           </a:p>
@@ -3025,7 +3025,7 @@
           <a:p>
             <a:fld id="{570D790B-F35A-4C90-BC4A-BA7F77964CA4}" type="datetime1">
               <a:rPr lang="ru-RU" smtClean="0"/>
-              <a:t>09.12.2025</a:t>
+              <a:t>16.12.2025</a:t>
             </a:fld>
             <a:endParaRPr lang="ru-RU"/>
           </a:p>
@@ -3262,7 +3262,7 @@
           <a:p>
             <a:fld id="{29AEF080-AA0F-44FA-BA62-A56D8619F7E7}" type="datetime1">
               <a:rPr lang="ru-RU" smtClean="0"/>
-              <a:t>09.12.2025</a:t>
+              <a:t>16.12.2025</a:t>
             </a:fld>
             <a:endParaRPr lang="ru-RU"/>
           </a:p>
@@ -3444,7 +3444,7 @@
           <a:p>
             <a:fld id="{83AB8CDF-4973-4195-91CA-18BA11F1D400}" type="datetime1">
               <a:rPr lang="ru-RU" smtClean="0"/>
-              <a:t>09.12.2025</a:t>
+              <a:t>16.12.2025</a:t>
             </a:fld>
             <a:endParaRPr lang="ru-RU"/>
           </a:p>
@@ -7399,7 +7399,7 @@
         </p:nvSpPr>
         <p:spPr>
           <a:xfrm>
-            <a:off x="130029" y="1520889"/>
+            <a:off x="130029" y="2048144"/>
             <a:ext cx="11476653" cy="1477328"/>
           </a:xfrm>
           <a:prstGeom prst="rect">
@@ -7460,7 +7460,7 @@
         </p:nvSpPr>
         <p:spPr>
           <a:xfrm>
-            <a:off x="130029" y="3347462"/>
+            <a:off x="130029" y="4669850"/>
             <a:ext cx="11476653" cy="369332"/>
           </a:xfrm>
           <a:prstGeom prst="rect">
@@ -7501,7 +7501,7 @@
         </p:nvSpPr>
         <p:spPr>
           <a:xfrm>
-            <a:off x="130984" y="3970269"/>
+            <a:off x="130029" y="5039488"/>
             <a:ext cx="11476653" cy="369332"/>
           </a:xfrm>
           <a:prstGeom prst="rect">
@@ -7521,6 +7521,215 @@
                 <a:latin typeface="quote-cjk-patch"/>
               </a:rPr>
               <a:t>Тогда не теряйте времени — начните прямо сейчас</a:t>
+            </a:r>
+            <a:endParaRPr lang="ru-RU" dirty="0">
+              <a:latin typeface="Gilroy Medium" panose="00000600000000000000" charset="-52"/>
+            </a:endParaRPr>
+          </a:p>
+        </p:txBody>
+      </p:sp>
+      <p:sp>
+        <p:nvSpPr>
+          <p:cNvPr id="12" name="TextBox 11">
+            <a:extLst>
+              <a:ext uri="{FF2B5EF4-FFF2-40B4-BE49-F238E27FC236}">
+                <a16:creationId xmlns:a16="http://schemas.microsoft.com/office/drawing/2014/main" id="{64ADDB1B-AAB1-47D7-9017-1F91EAD32E58}"/>
+              </a:ext>
+            </a:extLst>
+          </p:cNvPr>
+          <p:cNvSpPr txBox="1"/>
+          <p:nvPr/>
+        </p:nvSpPr>
+        <p:spPr>
+          <a:xfrm>
+            <a:off x="130029" y="912929"/>
+            <a:ext cx="11476653" cy="369332"/>
+          </a:xfrm>
+          <a:prstGeom prst="rect">
+            <a:avLst/>
+          </a:prstGeom>
+          <a:noFill/>
+        </p:spPr>
+        <p:txBody>
+          <a:bodyPr wrap="square" rtlCol="0">
+            <a:spAutoFit/>
+          </a:bodyPr>
+          <a:lstStyle/>
+          <a:p>
+            <a:r>
+              <a:rPr lang="ru-RU" b="1" i="0" u="none" strike="noStrike" dirty="0">
+                <a:effectLst/>
+                <a:latin typeface="quote-cjk-patch"/>
+              </a:rPr>
+              <a:t>Зачин:</a:t>
+            </a:r>
+            <a:endParaRPr lang="ru-RU" dirty="0">
+              <a:latin typeface="Gilroy Medium" panose="00000600000000000000" charset="-52"/>
+            </a:endParaRPr>
+          </a:p>
+        </p:txBody>
+      </p:sp>
+      <p:sp>
+        <p:nvSpPr>
+          <p:cNvPr id="13" name="TextBox 12">
+            <a:extLst>
+              <a:ext uri="{FF2B5EF4-FFF2-40B4-BE49-F238E27FC236}">
+                <a16:creationId xmlns:a16="http://schemas.microsoft.com/office/drawing/2014/main" id="{4480ADFF-9D07-423C-9106-B424A0850A7A}"/>
+              </a:ext>
+            </a:extLst>
+          </p:cNvPr>
+          <p:cNvSpPr txBox="1"/>
+          <p:nvPr/>
+        </p:nvSpPr>
+        <p:spPr>
+          <a:xfrm>
+            <a:off x="130029" y="1224333"/>
+            <a:ext cx="11476653" cy="369332"/>
+          </a:xfrm>
+          <a:prstGeom prst="rect">
+            <a:avLst/>
+          </a:prstGeom>
+          <a:noFill/>
+        </p:spPr>
+        <p:txBody>
+          <a:bodyPr wrap="square" rtlCol="0">
+            <a:spAutoFit/>
+          </a:bodyPr>
+          <a:lstStyle/>
+          <a:p>
+            <a:r>
+              <a:rPr lang="ru-RU" dirty="0">
+                <a:latin typeface="quote-cjk-patch"/>
+              </a:rPr>
+              <a:t>Готовы ли вы превратить свой бизнес в магнит для клиентов?</a:t>
+            </a:r>
+            <a:endParaRPr lang="ru-RU" dirty="0">
+              <a:latin typeface="Gilroy Medium" panose="00000600000000000000" charset="-52"/>
+            </a:endParaRPr>
+          </a:p>
+        </p:txBody>
+      </p:sp>
+      <p:sp>
+        <p:nvSpPr>
+          <p:cNvPr id="14" name="TextBox 13">
+            <a:extLst>
+              <a:ext uri="{FF2B5EF4-FFF2-40B4-BE49-F238E27FC236}">
+                <a16:creationId xmlns:a16="http://schemas.microsoft.com/office/drawing/2014/main" id="{B2F10B68-C6F7-440F-8C03-C0F02F2EF161}"/>
+              </a:ext>
+            </a:extLst>
+          </p:cNvPr>
+          <p:cNvSpPr txBox="1"/>
+          <p:nvPr/>
+        </p:nvSpPr>
+        <p:spPr>
+          <a:xfrm>
+            <a:off x="130029" y="3594281"/>
+            <a:ext cx="11476653" cy="369332"/>
+          </a:xfrm>
+          <a:prstGeom prst="rect">
+            <a:avLst/>
+          </a:prstGeom>
+          <a:noFill/>
+        </p:spPr>
+        <p:txBody>
+          <a:bodyPr wrap="square" rtlCol="0">
+            <a:spAutoFit/>
+          </a:bodyPr>
+          <a:lstStyle/>
+          <a:p>
+            <a:r>
+              <a:rPr lang="ru-RU" b="1" i="0" u="none" strike="noStrike" dirty="0">
+                <a:effectLst/>
+                <a:latin typeface="quote-cjk-patch"/>
+              </a:rPr>
+              <a:t>Эхо-фраза:</a:t>
+            </a:r>
+            <a:endParaRPr lang="ru-RU" dirty="0">
+              <a:latin typeface="Gilroy Medium" panose="00000600000000000000" charset="-52"/>
+            </a:endParaRPr>
+          </a:p>
+        </p:txBody>
+      </p:sp>
+      <p:sp>
+        <p:nvSpPr>
+          <p:cNvPr id="15" name="TextBox 14">
+            <a:extLst>
+              <a:ext uri="{FF2B5EF4-FFF2-40B4-BE49-F238E27FC236}">
+                <a16:creationId xmlns:a16="http://schemas.microsoft.com/office/drawing/2014/main" id="{365F2591-EDE3-4FF7-83BA-BB6C7059AE96}"/>
+              </a:ext>
+            </a:extLst>
+          </p:cNvPr>
+          <p:cNvSpPr txBox="1"/>
+          <p:nvPr/>
+        </p:nvSpPr>
+        <p:spPr>
+          <a:xfrm>
+            <a:off x="130984" y="3963613"/>
+            <a:ext cx="11476653" cy="369332"/>
+          </a:xfrm>
+          <a:prstGeom prst="rect">
+            <a:avLst/>
+          </a:prstGeom>
+          <a:noFill/>
+        </p:spPr>
+        <p:txBody>
+          <a:bodyPr wrap="square" rtlCol="0">
+            <a:spAutoFit/>
+          </a:bodyPr>
+          <a:lstStyle/>
+          <a:p>
+            <a:r>
+              <a:rPr lang="ru-RU" dirty="0" err="1">
+                <a:latin typeface="quote-cjk-patch"/>
+              </a:rPr>
+              <a:t>WebFlow</a:t>
+            </a:r>
+            <a:r>
+              <a:rPr lang="ru-RU" dirty="0">
+                <a:latin typeface="quote-cjk-patch"/>
+              </a:rPr>
+              <a:t>: поток идей — поток клиентов!</a:t>
+            </a:r>
+            <a:endParaRPr lang="ru-RU" dirty="0">
+              <a:latin typeface="Gilroy Medium" panose="00000600000000000000" charset="-52"/>
+            </a:endParaRPr>
+          </a:p>
+        </p:txBody>
+      </p:sp>
+      <p:sp>
+        <p:nvSpPr>
+          <p:cNvPr id="16" name="TextBox 15">
+            <a:extLst>
+              <a:ext uri="{FF2B5EF4-FFF2-40B4-BE49-F238E27FC236}">
+                <a16:creationId xmlns:a16="http://schemas.microsoft.com/office/drawing/2014/main" id="{00833500-0AF0-449F-8589-C2A75065DE5A}"/>
+              </a:ext>
+            </a:extLst>
+          </p:cNvPr>
+          <p:cNvSpPr txBox="1"/>
+          <p:nvPr/>
+        </p:nvSpPr>
+        <p:spPr>
+          <a:xfrm>
+            <a:off x="130029" y="1733758"/>
+            <a:ext cx="11476653" cy="369332"/>
+          </a:xfrm>
+          <a:prstGeom prst="rect">
+            <a:avLst/>
+          </a:prstGeom>
+          <a:noFill/>
+        </p:spPr>
+        <p:txBody>
+          <a:bodyPr wrap="square" rtlCol="0">
+            <a:spAutoFit/>
+          </a:bodyPr>
+          <a:lstStyle/>
+          <a:p>
+            <a:r>
+              <a:rPr lang="ru-RU" b="1" i="0" u="none" strike="noStrike" dirty="0">
+                <a:effectLst/>
+                <a:latin typeface="quote-cjk-patch"/>
+              </a:rPr>
+              <a:t>Основной рекламный текст:</a:t>
             </a:r>
             <a:endParaRPr lang="ru-RU" dirty="0">
               <a:latin typeface="Gilroy Medium" panose="00000600000000000000" charset="-52"/>
@@ -7630,10 +7839,14 @@
           <a:lstStyle/>
           <a:p>
             <a:fld id="{A01BE76D-E181-4177-862E-40D97C82BFEB}" type="slidenum">
-              <a:rPr lang="ru-RU" sz="3200" smtClean="0"/>
+              <a:rPr lang="ru-RU" sz="3200" smtClean="0">
+                <a:latin typeface="quote-cjk-patch"/>
+              </a:rPr>
               <a:t>9</a:t>
             </a:fld>
-            <a:endParaRPr lang="ru-RU" sz="3200" dirty="0"/>
+            <a:endParaRPr lang="ru-RU" sz="3200" dirty="0">
+              <a:latin typeface="quote-cjk-patch"/>
+            </a:endParaRPr>
           </a:p>
         </p:txBody>
       </p:sp>
@@ -7651,8 +7864,8 @@
         </p:nvSpPr>
         <p:spPr>
           <a:xfrm>
-            <a:off x="130030" y="328154"/>
-            <a:ext cx="7959612" cy="1077218"/>
+            <a:off x="130029" y="328154"/>
+            <a:ext cx="9495233" cy="584775"/>
           </a:xfrm>
           <a:prstGeom prst="rect">
             <a:avLst/>
@@ -7673,7 +7886,7 @@
                 <a:effectLst/>
                 <a:uLnTx/>
                 <a:uFillTx/>
-                <a:latin typeface="Gilroy Medium" panose="00000600000000000000" charset="-52"/>
+                <a:latin typeface="quote-cjk-patch"/>
                 <a:ea typeface="+mj-ea"/>
                 <a:cs typeface="+mj-cs"/>
               </a:rPr>
@@ -7686,59 +7899,10 @@
               <a:effectLst/>
               <a:uLnTx/>
               <a:uFillTx/>
-              <a:latin typeface="Gilroy Medium" panose="00000600000000000000" charset="-52"/>
+              <a:latin typeface="quote-cjk-patch"/>
               <a:ea typeface="+mj-ea"/>
               <a:cs typeface="+mj-cs"/>
             </a:endParaRPr>
-          </a:p>
-        </p:txBody>
-      </p:sp>
-      <p:sp>
-        <p:nvSpPr>
-          <p:cNvPr id="8" name="TextBox 7">
-            <a:extLst>
-              <a:ext uri="{FF2B5EF4-FFF2-40B4-BE49-F238E27FC236}">
-                <a16:creationId xmlns:a16="http://schemas.microsoft.com/office/drawing/2014/main" id="{6EED8924-3C72-3C11-D4DF-BD12E99DFD0F}"/>
-              </a:ext>
-            </a:extLst>
-          </p:cNvPr>
-          <p:cNvSpPr txBox="1"/>
-          <p:nvPr/>
-        </p:nvSpPr>
-        <p:spPr>
-          <a:xfrm>
-            <a:off x="130029" y="2798314"/>
-            <a:ext cx="11476653" cy="923330"/>
-          </a:xfrm>
-          <a:prstGeom prst="rect">
-            <a:avLst/>
-          </a:prstGeom>
-          <a:noFill/>
-        </p:spPr>
-        <p:txBody>
-          <a:bodyPr wrap="square" rtlCol="0">
-            <a:spAutoFit/>
-          </a:bodyPr>
-          <a:lstStyle/>
-          <a:p>
-            <a:r>
-              <a:rPr lang="ru-RU" dirty="0">
-                <a:latin typeface="Gilroy Medium" panose="00000600000000000000" charset="-52"/>
-              </a:rPr>
-              <a:t>Профессиональный сайт — это не просто траты, это инвестиция в ваш бизнес. </a:t>
-            </a:r>
-            <a:r>
-              <a:rPr lang="en-US" dirty="0" err="1">
-                <a:latin typeface="Gilroy Medium" panose="00000600000000000000" charset="-52"/>
-              </a:rPr>
-              <a:t>WebFlow</a:t>
-            </a:r>
-            <a:r>
-              <a:rPr lang="ru-RU" dirty="0">
-                <a:latin typeface="Gilroy Medium" panose="00000600000000000000" charset="-52"/>
-              </a:rPr>
-              <a:t> создаёт сайты, которые окупаются благодаря увеличению продаж и снижению затрат на доработки. Вы выбираете не просто сайт, а инструмент для роста.</a:t>
-            </a:r>
           </a:p>
         </p:txBody>
       </p:sp>
@@ -7756,8 +7920,8 @@
         </p:nvSpPr>
         <p:spPr>
           <a:xfrm>
-            <a:off x="130029" y="1541281"/>
-            <a:ext cx="11450424" cy="1754326"/>
+            <a:off x="103800" y="1996757"/>
+            <a:ext cx="11450424" cy="1323439"/>
           </a:xfrm>
           <a:prstGeom prst="rect">
             <a:avLst/>
@@ -7771,27 +7935,39 @@
           <a:lstStyle/>
           <a:p>
             <a:r>
-              <a:rPr lang="ru-RU" dirty="0">
-                <a:latin typeface="Gilroy Medium" panose="00000600000000000000" charset="-52"/>
+              <a:rPr lang="ru-RU" sz="1600" dirty="0">
+                <a:latin typeface="quote-cjk-patch"/>
               </a:rPr>
               <a:t>Рефрейминг содержания</a:t>
             </a:r>
           </a:p>
           <a:p>
             <a:r>
-              <a:rPr lang="ru-RU" dirty="0">
-                <a:latin typeface="Gilroy Medium" panose="00000600000000000000" charset="-52"/>
+              <a:rPr lang="ru-RU" sz="1600" dirty="0">
+                <a:latin typeface="quote-cjk-patch"/>
               </a:rPr>
               <a:t>Потенциальные клиенты могут считать, что профессиональные сайты - это дорого. Вместо акцента на высокой стоимости, следует подчеркнуть, что это инвестиция, которая окупается за счет увеличения доходов и сокращения расходов на доработки.</a:t>
             </a:r>
           </a:p>
           <a:p>
-            <a:endParaRPr lang="ru-RU" dirty="0">
-              <a:latin typeface="Gilroy Medium" panose="00000600000000000000" charset="-52"/>
-            </a:endParaRPr>
-          </a:p>
-          <a:p>
-            <a:endParaRPr lang="ru-RU" dirty="0"/>
+            <a:r>
+              <a:rPr lang="ru-RU" sz="1600" dirty="0">
+                <a:latin typeface="quote-cjk-patch"/>
+              </a:rPr>
+              <a:t>Профессиональный сайт — это не просто траты, это инвестиция в ваш бизнес. </a:t>
+            </a:r>
+            <a:r>
+              <a:rPr lang="en-US" sz="1600" dirty="0" err="1">
+                <a:latin typeface="quote-cjk-patch"/>
+              </a:rPr>
+              <a:t>WebFlow</a:t>
+            </a:r>
+            <a:r>
+              <a:rPr lang="ru-RU" sz="1600" dirty="0">
+                <a:latin typeface="quote-cjk-patch"/>
+              </a:rPr>
+              <a:t> создаёт сайты, которые окупаются благодаря увеличению продаж и снижению затрат на доработки. Вы выбираете не просто сайт, а инструмент для роста.</a:t>
+            </a:r>
           </a:p>
         </p:txBody>
       </p:sp>
@@ -7809,7 +7985,7 @@
         </p:nvSpPr>
         <p:spPr>
           <a:xfrm>
-            <a:off x="130029" y="4073373"/>
+            <a:off x="130029" y="4316939"/>
             <a:ext cx="11476653" cy="369332"/>
           </a:xfrm>
           <a:prstGeom prst="rect">
@@ -7824,10 +8000,10 @@
           <a:lstStyle/>
           <a:p>
             <a:r>
-              <a:rPr lang="ru-RU" dirty="0">
-                <a:latin typeface="Gilroy Medium" panose="00000600000000000000" charset="-52"/>
-              </a:rPr>
-              <a:t>Рефрейминг рамки</a:t>
+              <a:rPr lang="ru-RU" b="1" dirty="0">
+                <a:latin typeface="quote-cjk-patch"/>
+              </a:rPr>
+              <a:t>Рефрейминг рамки:</a:t>
             </a:r>
           </a:p>
         </p:txBody>
@@ -7846,8 +8022,8 @@
         </p:nvSpPr>
         <p:spPr>
           <a:xfrm>
-            <a:off x="130029" y="4478709"/>
-            <a:ext cx="11476653" cy="646331"/>
+            <a:off x="103800" y="4686271"/>
+            <a:ext cx="11476653" cy="338554"/>
           </a:xfrm>
           <a:prstGeom prst="rect">
             <a:avLst/>
@@ -7861,28 +8037,28 @@
           <a:lstStyle/>
           <a:p>
             <a:r>
-              <a:rPr lang="ru-RU" b="0" i="0" u="none" strike="noStrike" dirty="0">
+              <a:rPr lang="ru-RU" sz="1600" b="0" i="0" u="none" strike="noStrike" dirty="0">
                 <a:effectLst/>
                 <a:latin typeface="quote-cjk-patch"/>
               </a:rPr>
               <a:t>Сайт – это </a:t>
             </a:r>
             <a:r>
-              <a:rPr lang="ru-RU" b="1" i="0" u="none" strike="noStrike" dirty="0">
+              <a:rPr lang="ru-RU" sz="1600" b="1" i="0" u="none" strike="noStrike" dirty="0">
                 <a:effectLst/>
                 <a:latin typeface="quote-cjk-patch"/>
               </a:rPr>
               <a:t>цифровой представитель вашего бренда</a:t>
             </a:r>
             <a:r>
-              <a:rPr lang="ru-RU" b="0" i="0" u="none" strike="noStrike" dirty="0">
+              <a:rPr lang="ru-RU" sz="1600" b="0" i="0" u="none" strike="noStrike" dirty="0">
                 <a:effectLst/>
                 <a:latin typeface="quote-cjk-patch"/>
               </a:rPr>
               <a:t>, который работает 24/7, общается с клиентами и строит доверие.</a:t>
             </a:r>
-            <a:endParaRPr lang="ru-RU" dirty="0">
-              <a:latin typeface="Gilroy Medium" panose="00000600000000000000" charset="-52"/>
+            <a:endParaRPr lang="ru-RU" sz="1600" dirty="0">
+              <a:latin typeface="quote-cjk-patch"/>
             </a:endParaRPr>
           </a:p>
         </p:txBody>
@@ -7918,7 +8094,7 @@
             <a:r>
               <a:rPr lang="ru-RU" sz="1400" dirty="0">
                 <a:effectLst/>
-                <a:latin typeface="Helvetica Neue" panose="02000503000000020004" pitchFamily="2" charset="0"/>
+                <a:latin typeface="quote-cjk-patch"/>
               </a:rPr>
               <a:t>Вопросы для рефрейминга:</a:t>
             </a:r>
@@ -7927,7 +8103,7 @@
             <a:r>
               <a:rPr lang="ru-RU" sz="1400" dirty="0">
                 <a:effectLst/>
-                <a:latin typeface="Helvetica Neue" panose="02000503000000020004" pitchFamily="2" charset="0"/>
+                <a:latin typeface="quote-cjk-patch"/>
               </a:rPr>
               <a:t>1 В каком контексте сайт становится не расходом, а активом?</a:t>
             </a:r>
@@ -7936,7 +8112,7 @@
             <a:r>
               <a:rPr lang="ru-RU" sz="1400" dirty="0">
                 <a:effectLst/>
-                <a:latin typeface="Helvetica Neue" panose="02000503000000020004" pitchFamily="2" charset="0"/>
+                <a:latin typeface="quote-cjk-patch"/>
               </a:rPr>
               <a:t>2 Какую более широкую ценность он приносит?</a:t>
             </a:r>
@@ -7945,7 +8121,7 @@
             <a:r>
               <a:rPr lang="ru-RU" sz="1400" dirty="0">
                 <a:effectLst/>
-                <a:latin typeface="Helvetica Neue" panose="02000503000000020004" pitchFamily="2" charset="0"/>
+                <a:latin typeface="quote-cjk-patch"/>
               </a:rPr>
               <a:t>3 Какие скрытые аспекты можно выделить?</a:t>
             </a:r>
@@ -7954,7 +8130,7 @@
             <a:r>
               <a:rPr lang="ru-RU" sz="1400" dirty="0">
                 <a:effectLst/>
-                <a:latin typeface="Helvetica Neue" panose="02000503000000020004" pitchFamily="2" charset="0"/>
+                <a:latin typeface="quote-cjk-patch"/>
               </a:rPr>
               <a:t>Ответ:</a:t>
             </a:r>
@@ -7963,13 +8139,219 @@
             <a:r>
               <a:rPr lang="ru-RU" sz="1400" dirty="0">
                 <a:effectLst/>
-                <a:latin typeface="Helvetica Neue" panose="02000503000000020004" pitchFamily="2" charset="0"/>
+                <a:latin typeface="quote-cjk-patch"/>
               </a:rPr>
               <a:t>Сайт как инвестиция в репутацию и долгосрочные отношения с клиентом.</a:t>
             </a:r>
           </a:p>
           <a:p>
             <a:endParaRPr lang="ru-RU" sz="1400" dirty="0">
+              <a:latin typeface="quote-cjk-patch"/>
+            </a:endParaRPr>
+          </a:p>
+        </p:txBody>
+      </p:sp>
+      <p:sp>
+        <p:nvSpPr>
+          <p:cNvPr id="12" name="TextBox 11">
+            <a:extLst>
+              <a:ext uri="{FF2B5EF4-FFF2-40B4-BE49-F238E27FC236}">
+                <a16:creationId xmlns:a16="http://schemas.microsoft.com/office/drawing/2014/main" id="{5D4F1BEF-B4E8-4A10-9C7D-C5B805377E8A}"/>
+              </a:ext>
+            </a:extLst>
+          </p:cNvPr>
+          <p:cNvSpPr txBox="1"/>
+          <p:nvPr/>
+        </p:nvSpPr>
+        <p:spPr>
+          <a:xfrm>
+            <a:off x="130029" y="3397404"/>
+            <a:ext cx="11476653" cy="369332"/>
+          </a:xfrm>
+          <a:prstGeom prst="rect">
+            <a:avLst/>
+          </a:prstGeom>
+          <a:noFill/>
+        </p:spPr>
+        <p:txBody>
+          <a:bodyPr wrap="square" rtlCol="0">
+            <a:spAutoFit/>
+          </a:bodyPr>
+          <a:lstStyle/>
+          <a:p>
+            <a:r>
+              <a:rPr lang="ru-RU" b="1" i="0" u="none" strike="noStrike" dirty="0">
+                <a:effectLst/>
+                <a:latin typeface="quote-cjk-patch"/>
+              </a:rPr>
+              <a:t>Эхо-фраза:</a:t>
+            </a:r>
+            <a:endParaRPr lang="ru-RU" dirty="0">
+              <a:latin typeface="quote-cjk-patch"/>
+            </a:endParaRPr>
+          </a:p>
+        </p:txBody>
+      </p:sp>
+      <p:sp>
+        <p:nvSpPr>
+          <p:cNvPr id="13" name="TextBox 12">
+            <a:extLst>
+              <a:ext uri="{FF2B5EF4-FFF2-40B4-BE49-F238E27FC236}">
+                <a16:creationId xmlns:a16="http://schemas.microsoft.com/office/drawing/2014/main" id="{DBD2C726-6D41-4EAA-9868-7A175E264773}"/>
+              </a:ext>
+            </a:extLst>
+          </p:cNvPr>
+          <p:cNvSpPr txBox="1"/>
+          <p:nvPr/>
+        </p:nvSpPr>
+        <p:spPr>
+          <a:xfrm>
+            <a:off x="130029" y="3730175"/>
+            <a:ext cx="11476653" cy="338554"/>
+          </a:xfrm>
+          <a:prstGeom prst="rect">
+            <a:avLst/>
+          </a:prstGeom>
+          <a:noFill/>
+        </p:spPr>
+        <p:txBody>
+          <a:bodyPr wrap="square" rtlCol="0">
+            <a:spAutoFit/>
+          </a:bodyPr>
+          <a:lstStyle/>
+          <a:p>
+            <a:r>
+              <a:rPr lang="ru-RU" sz="1600" dirty="0" err="1">
+                <a:latin typeface="quote-cjk-patch"/>
+              </a:rPr>
+              <a:t>WebFlow</a:t>
+            </a:r>
+            <a:r>
+              <a:rPr lang="ru-RU" sz="1600" dirty="0">
+                <a:latin typeface="quote-cjk-patch"/>
+              </a:rPr>
+              <a:t>: поток идей — поток клиентов!</a:t>
+            </a:r>
+          </a:p>
+        </p:txBody>
+      </p:sp>
+      <p:sp>
+        <p:nvSpPr>
+          <p:cNvPr id="14" name="TextBox 13">
+            <a:extLst>
+              <a:ext uri="{FF2B5EF4-FFF2-40B4-BE49-F238E27FC236}">
+                <a16:creationId xmlns:a16="http://schemas.microsoft.com/office/drawing/2014/main" id="{43D1382E-7E28-4E8A-9055-12C441ACFD8B}"/>
+              </a:ext>
+            </a:extLst>
+          </p:cNvPr>
+          <p:cNvSpPr txBox="1"/>
+          <p:nvPr/>
+        </p:nvSpPr>
+        <p:spPr>
+          <a:xfrm>
+            <a:off x="130029" y="912929"/>
+            <a:ext cx="11476653" cy="369332"/>
+          </a:xfrm>
+          <a:prstGeom prst="rect">
+            <a:avLst/>
+          </a:prstGeom>
+          <a:noFill/>
+        </p:spPr>
+        <p:txBody>
+          <a:bodyPr wrap="square" rtlCol="0">
+            <a:spAutoFit/>
+          </a:bodyPr>
+          <a:lstStyle/>
+          <a:p>
+            <a:r>
+              <a:rPr lang="ru-RU" b="1" i="0" u="none" strike="noStrike" dirty="0">
+                <a:effectLst/>
+                <a:latin typeface="quote-cjk-patch"/>
+              </a:rPr>
+              <a:t>Зачин:</a:t>
+            </a:r>
+            <a:endParaRPr lang="ru-RU" dirty="0">
+              <a:latin typeface="Gilroy Medium" panose="00000600000000000000" charset="-52"/>
+            </a:endParaRPr>
+          </a:p>
+        </p:txBody>
+      </p:sp>
+      <p:sp>
+        <p:nvSpPr>
+          <p:cNvPr id="15" name="TextBox 14">
+            <a:extLst>
+              <a:ext uri="{FF2B5EF4-FFF2-40B4-BE49-F238E27FC236}">
+                <a16:creationId xmlns:a16="http://schemas.microsoft.com/office/drawing/2014/main" id="{D5D6E153-B6F6-4DF9-A4A1-DCA91815F9F0}"/>
+              </a:ext>
+            </a:extLst>
+          </p:cNvPr>
+          <p:cNvSpPr txBox="1"/>
+          <p:nvPr/>
+        </p:nvSpPr>
+        <p:spPr>
+          <a:xfrm>
+            <a:off x="130029" y="1224333"/>
+            <a:ext cx="11476653" cy="338554"/>
+          </a:xfrm>
+          <a:prstGeom prst="rect">
+            <a:avLst/>
+          </a:prstGeom>
+          <a:noFill/>
+        </p:spPr>
+        <p:txBody>
+          <a:bodyPr wrap="square" rtlCol="0">
+            <a:spAutoFit/>
+          </a:bodyPr>
+          <a:lstStyle/>
+          <a:p>
+            <a:r>
+              <a:rPr lang="ru-RU" sz="1600" dirty="0">
+                <a:latin typeface="quote-cjk-patch"/>
+              </a:rPr>
+              <a:t>Ваш сайт — это траты... или инструмент роста?</a:t>
+            </a:r>
+            <a:endParaRPr lang="ru-RU" sz="1600" dirty="0">
+              <a:latin typeface="Gilroy Medium" panose="00000600000000000000" charset="-52"/>
+            </a:endParaRPr>
+          </a:p>
+        </p:txBody>
+      </p:sp>
+      <p:sp>
+        <p:nvSpPr>
+          <p:cNvPr id="16" name="TextBox 15">
+            <a:extLst>
+              <a:ext uri="{FF2B5EF4-FFF2-40B4-BE49-F238E27FC236}">
+                <a16:creationId xmlns:a16="http://schemas.microsoft.com/office/drawing/2014/main" id="{27358C6B-26C9-4DB0-AD67-121D9EA7A4B5}"/>
+              </a:ext>
+            </a:extLst>
+          </p:cNvPr>
+          <p:cNvSpPr txBox="1"/>
+          <p:nvPr/>
+        </p:nvSpPr>
+        <p:spPr>
+          <a:xfrm>
+            <a:off x="130029" y="1644793"/>
+            <a:ext cx="11476653" cy="369332"/>
+          </a:xfrm>
+          <a:prstGeom prst="rect">
+            <a:avLst/>
+          </a:prstGeom>
+          <a:noFill/>
+        </p:spPr>
+        <p:txBody>
+          <a:bodyPr wrap="square" rtlCol="0">
+            <a:spAutoFit/>
+          </a:bodyPr>
+          <a:lstStyle/>
+          <a:p>
+            <a:r>
+              <a:rPr lang="ru-RU" b="1" i="0" u="none" strike="noStrike" dirty="0">
+                <a:effectLst/>
+                <a:latin typeface="quote-cjk-patch"/>
+              </a:rPr>
+              <a:t>Основной рекламный текст:</a:t>
+            </a:r>
+            <a:endParaRPr lang="ru-RU" dirty="0">
               <a:latin typeface="Gilroy Medium" panose="00000600000000000000" charset="-52"/>
             </a:endParaRPr>
           </a:p>
